--- a/assets/pptx/catalog-105.pptx
+++ b/assets/pptx/catalog-105.pptx
@@ -3285,7 +3285,7 @@
                 <a:ea typeface="Ebrima"/>
                 <a:cs typeface="Ebrima"/>
               </a:rPr>
-              <a:t>ለእኔ ግን ወደ አንተ መቅረብ ይሻለኛል (3x)</a:t>
+              <a:t>ለእኔ ግን ወደ አንተ መቅረብ ይሻለኛል 3x</a:t>
             </a:r>
           </a:p>
         </p:txBody>
@@ -3388,7 +3388,7 @@
                 <a:ea typeface="Ebrima"/>
                 <a:cs typeface="Ebrima"/>
               </a:rPr>
-              <a:t>ጌታዬ እሰማሃለሁ ከጭንቀት ከሃዘን አርፋለሁ (2x)</a:t>
+              <a:t>ጌታዬ እሰማሃለሁ ከጭንቀት ከሃዘን አርፋለሁ 2x</a:t>
             </a:r>
           </a:p>
           <a:p>
@@ -3406,7 +3406,7 @@
                 <a:ea typeface="Ebrima"/>
                 <a:cs typeface="Ebrima"/>
               </a:rPr>
-              <a:t>ብለሃል እሰማሃለሁ ከጭንቀት ከሃዘን አርፋለሁ (2x)</a:t>
+              <a:t>ብለሃል እሰማሃለሁ ከጭንቀት ከሃዘን አርፋለሁ 2x</a:t>
             </a:r>
           </a:p>
         </p:txBody>
@@ -3509,7 +3509,7 @@
                 <a:ea typeface="Ebrima"/>
                 <a:cs typeface="Ebrima"/>
               </a:rPr>
-              <a:t>ለእኔ ግን ወደ አንተ መቅረብ ይሻለኛል (3x)</a:t>
+              <a:t>ለእኔ ግን ወደ አንተ መቅረብ ይሻለኛል 3x</a:t>
             </a:r>
           </a:p>
         </p:txBody>
@@ -3576,7 +3576,7 @@
                 <a:ea typeface="Ebrima"/>
                 <a:cs typeface="Ebrima"/>
               </a:rPr>
-              <a:t>የሚያስፈልገው ጥቂት አንድ ነው (2x)</a:t>
+              <a:t>የሚያስፈልገው ጥቂት አንድ ነው 2x</a:t>
             </a:r>
           </a:p>
           <a:p>
@@ -3594,7 +3594,7 @@
                 <a:ea typeface="Ebrima"/>
                 <a:cs typeface="Ebrima"/>
               </a:rPr>
-              <a:t>በእግርህ ስር ሆኖ አንተን ማድመጥ ነው (2x)</a:t>
+              <a:t>በእግርህ ስር ሆኖ አንተን ማድመጥ ነው 2x</a:t>
             </a:r>
           </a:p>
           <a:p>
@@ -3612,7 +3612,7 @@
                 <a:ea typeface="Ebrima"/>
                 <a:cs typeface="Ebrima"/>
               </a:rPr>
-              <a:t>ይህን ተረዳሁ ምን እፈልጋለሁ (2x)</a:t>
+              <a:t>ይህን ተረዳሁ ምን እፈልጋለሁ 2x</a:t>
             </a:r>
           </a:p>
           <a:p>
@@ -3630,7 +3630,7 @@
                 <a:ea typeface="Ebrima"/>
                 <a:cs typeface="Ebrima"/>
               </a:rPr>
-              <a:t>ከእግርህ ስር ሆኜ አደምጥሃለሁ (2x)</a:t>
+              <a:t>ከእግርህ ስር ሆኜ አደምጥሃለሁ 2x</a:t>
             </a:r>
           </a:p>
         </p:txBody>
@@ -3733,7 +3733,7 @@
                 <a:ea typeface="Ebrima"/>
                 <a:cs typeface="Ebrima"/>
               </a:rPr>
-              <a:t>ለእኔ ግን ወደ አንተ መቅረብ ይሻለኛል (3x)</a:t>
+              <a:t>ለእኔ ግን ወደ አንተ መቅረብ ይሻለኛል 3x</a:t>
             </a:r>
           </a:p>
         </p:txBody>
@@ -3800,7 +3800,7 @@
                 <a:ea typeface="Ebrima"/>
                 <a:cs typeface="Ebrima"/>
               </a:rPr>
-              <a:t>ከዝማሬዬ ይልቅ ኑሮዬ ያክብርህ (2x)</a:t>
+              <a:t>ከዝማሬዬ ይልቅ ኑሮዬ ያክብርህ 2x</a:t>
             </a:r>
           </a:p>
           <a:p>
@@ -3818,7 +3818,7 @@
                 <a:ea typeface="Ebrima"/>
                 <a:cs typeface="Ebrima"/>
               </a:rPr>
-              <a:t>በሕይወት ዘመኔ ስንቱን ላስጠራልህ (2x)</a:t>
+              <a:t>በሕይወት ዘመኔ ስንቱን ላስጠራልህ 2x</a:t>
             </a:r>
           </a:p>
           <a:p>
@@ -3836,7 +3836,7 @@
                 <a:ea typeface="Ebrima"/>
                 <a:cs typeface="Ebrima"/>
               </a:rPr>
-              <a:t>ከአገልግሎቴ ይልቅ ሕይወቴ ያማረ ይሁን (2x)</a:t>
+              <a:t>ከአገልግሎቴ ይልቅ ሕይወቴ ያማረ ይሁን 2x</a:t>
             </a:r>
           </a:p>
           <a:p>
@@ -3854,7 +3854,7 @@
                 <a:ea typeface="Ebrima"/>
                 <a:cs typeface="Ebrima"/>
               </a:rPr>
-              <a:t>አንተ እንደምትወደው እንደፈቀድክ ይሁን (2x)</a:t>
+              <a:t>አንተ እንደምትወደው እንደፈቀድክ ይሁን 2x</a:t>
             </a:r>
           </a:p>
         </p:txBody>
@@ -3957,7 +3957,7 @@
                 <a:ea typeface="Ebrima"/>
                 <a:cs typeface="Ebrima"/>
               </a:rPr>
-              <a:t>ለእኔ ግን ወደ አንተ መቅረብ ይሻለኛል (3x)</a:t>
+              <a:t>ለእኔ ግን ወደ አንተ መቅረብ ይሻለኛል 3x</a:t>
             </a:r>
           </a:p>
         </p:txBody>
@@ -4024,7 +4024,7 @@
                 <a:ea typeface="Ebrima"/>
                 <a:cs typeface="Ebrima"/>
               </a:rPr>
-              <a:t>ጌታዬ ወደ አንተ እገሰግሳለሁ (2x)</a:t>
+              <a:t>ጌታዬ ወደ አንተ እገሰግሳለሁ 2x</a:t>
             </a:r>
           </a:p>
           <a:p>
@@ -4042,7 +4042,7 @@
                 <a:ea typeface="Ebrima"/>
                 <a:cs typeface="Ebrima"/>
               </a:rPr>
-              <a:t>ፊትህንም ማየት እጅግ ናፍቃለሁ (2x)</a:t>
+              <a:t>ፊትህንም ማየት እጅግ ናፍቃለሁ 2x</a:t>
             </a:r>
           </a:p>
           <a:p>
@@ -4060,7 +4060,7 @@
                 <a:ea typeface="Ebrima"/>
                 <a:cs typeface="Ebrima"/>
               </a:rPr>
-              <a:t>የሚረዳኝ ፀጋ ከአንተ ፈልጋለሁ (2x)</a:t>
+              <a:t>የሚረዳኝ ፀጋ ከአንተ ፈልጋለሁ 2x</a:t>
             </a:r>
           </a:p>
           <a:p>
@@ -4078,7 +4078,7 @@
                 <a:ea typeface="Ebrima"/>
                 <a:cs typeface="Ebrima"/>
               </a:rPr>
-              <a:t>ስለዚህ ጌታዬ ወደ አንተ እቀርባለሁ (2x)</a:t>
+              <a:t>ስለዚህ ጌታዬ ወደ አንተ እቀርባለሁ 2x</a:t>
             </a:r>
           </a:p>
         </p:txBody>
@@ -4181,7 +4181,7 @@
                 <a:ea typeface="Ebrima"/>
                 <a:cs typeface="Ebrima"/>
               </a:rPr>
-              <a:t>ጌታዬ እሰማሃለሁ ከጭንቀት ከሃዘን አርፋለሁ (2x)</a:t>
+              <a:t>ጌታዬ እሰማሃለሁ ከጭንቀት ከሃዘን አርፋለሁ 2x</a:t>
             </a:r>
           </a:p>
           <a:p>
@@ -4199,7 +4199,7 @@
                 <a:ea typeface="Ebrima"/>
                 <a:cs typeface="Ebrima"/>
               </a:rPr>
-              <a:t>ብለሃል እሰማሃለሁ ከጭንቀት ከሃዘን አርፋለሁ (2x)</a:t>
+              <a:t>ብለሃል እሰማሃለሁ ከጭንቀት ከሃዘን አርፋለሁ 2x</a:t>
             </a:r>
           </a:p>
         </p:txBody>
